--- a/deliverables/SalaryShield_Pitch_Deck.pptx
+++ b/deliverables/SalaryShield_Pitch_Deck.pptx
@@ -3457,7 +3457,7 @@
                 </a:solidFill>
                 <a:latin typeface="Segoe UI"/>
               </a:rPr>
-              <a:t>GenAI Copilot</a:t>
+              <a:t>Google Gemini AI</a:t>
             </a:r>
           </a:p>
         </p:txBody>
@@ -3519,7 +3519,62 @@
       </p:sp>
       <p:sp>
         <p:nvSpPr>
-          <p:cNvPr id="10" name="TextBox 9"/>
+          <p:cNvPr id="10" name="Rounded Rectangle 9"/>
+          <p:cNvSpPr/>
+          <p:nvPr/>
+        </p:nvSpPr>
+        <p:spPr>
+          <a:xfrm>
+            <a:off x="8686800" y="4754880"/>
+            <a:ext cx="1737360" cy="457200"/>
+          </a:xfrm>
+          <a:prstGeom prst="roundRect">
+            <a:avLst/>
+          </a:prstGeom>
+          <a:solidFill>
+            <a:srgbClr val="1A2133"/>
+          </a:solidFill>
+          <a:ln w="15875">
+            <a:solidFill>
+              <a:srgbClr val="8B5CF6"/>
+            </a:solidFill>
+          </a:ln>
+          <a:effectLst/>
+        </p:spPr>
+        <p:style>
+          <a:lnRef idx="1">
+            <a:schemeClr val="accent1"/>
+          </a:lnRef>
+          <a:fillRef idx="3">
+            <a:schemeClr val="accent1"/>
+          </a:fillRef>
+          <a:effectRef idx="2">
+            <a:schemeClr val="accent1"/>
+          </a:effectRef>
+          <a:fontRef idx="minor">
+            <a:schemeClr val="lt1"/>
+          </a:fontRef>
+        </p:style>
+        <p:txBody>
+          <a:bodyPr rtlCol="0" anchor="ctr"/>
+          <a:lstStyle/>
+          <a:p>
+            <a:pPr algn="ctr"/>
+            <a:r>
+              <a:rPr sz="1300" b="1">
+                <a:solidFill>
+                  <a:srgbClr val="F9FAFB"/>
+                </a:solidFill>
+                <a:latin typeface="Segoe UI"/>
+              </a:rPr>
+              <a:t>Live Employer Console</a:t>
+            </a:r>
+          </a:p>
+        </p:txBody>
+      </p:sp>
+      <p:sp>
+        <p:nvSpPr>
+          <p:cNvPr id="11" name="TextBox 10"/>
           <p:cNvSpPr txBox="1"/>
           <p:nvPr/>
         </p:nvSpPr>
@@ -4111,7 +4166,7 @@
                 </a:solidFill>
                 <a:latin typeface="Segoe UI"/>
               </a:rPr>
-              <a:t>Live, interactive, and offline-safe</a:t>
+              <a:t>Live, interactive, end to end</a:t>
             </a:r>
           </a:p>
         </p:txBody>
@@ -4162,7 +4217,7 @@
                 </a:solidFill>
                 <a:latin typeface="Segoe UI"/>
               </a:rPr>
-              <a:t>A running MVP — not slideware. Three-minute flow:</a:t>
+              <a:t>A running MVP — not slideware. Four-minute flow:</a:t>
             </a:r>
           </a:p>
           <a:p>
@@ -4190,7 +4245,7 @@
                 </a:solidFill>
                 <a:latin typeface="Segoe UI"/>
               </a:rPr>
-              <a:t>1  Budget Planner — enter salary &amp; expenses → live personal inflation, savings-depletion chart, break-even raise; push rent up → deficit alert fires.</a:t>
+              <a:t>1  Budget Planner — enter salary, city &amp; expenses → live personal inflation, savings-depletion chart, break-even raise; push rent up → deficit alert fires.</a:t>
             </a:r>
           </a:p>
           <a:p>
@@ -4246,7 +4301,7 @@
                 </a:solidFill>
                 <a:latin typeface="Segoe UI"/>
               </a:rPr>
-              <a:t>3  GenAI Copilot — 'Am I underpaid?' answers with the same live figures.</a:t>
+              <a:t>3  GenAI Copilot — ask 'Am I underpaid?' → a real Gemini call answers with the same live figures.</a:t>
             </a:r>
           </a:p>
           <a:p>
@@ -4270,11 +4325,11 @@
             <a:r>
               <a:rPr sz="1800">
                 <a:solidFill>
-                  <a:srgbClr val="F59E0B"/>
-                </a:solidFill>
-                <a:latin typeface="Segoe UI"/>
-              </a:rPr>
-              <a:t>Deterministic fallback means the demo never breaks, even without a network.</a:t>
+                  <a:srgbClr val="B6BDCC"/>
+                </a:solidFill>
+                <a:latin typeface="Segoe UI"/>
+              </a:rPr>
+              <a:t>4  Employer Console — move the hike slider → attrition risk, ROI and fairness metrics recompute live.</a:t>
             </a:r>
           </a:p>
         </p:txBody>
@@ -4910,7 +4965,7 @@
                 </a:solidFill>
                 <a:latin typeface="Segoe UI"/>
               </a:rPr>
-              <a:t>Now: MVP live — CLII model, 5 modules, budget engine, grounded Copilot.</a:t>
+              <a:t>Now: MVP live — CLII model, 5 modules, live Employer Console, budget engine, Gemini-powered Copilot.</a:t>
             </a:r>
           </a:p>
           <a:p>
@@ -4938,7 +4993,7 @@
                 </a:solidFill>
                 <a:latin typeface="Segoe UI"/>
               </a:rPr>
-              <a:t>Next: live data ingestion (MOSPI/RBI/rent/basket) + CLII pipeline.</a:t>
+              <a:t>Next: live data ingestion (MOSPI/RBI/rent/basket) feeding the CLII pipeline.</a:t>
             </a:r>
           </a:p>
           <a:p>
@@ -4966,7 +5021,7 @@
                 </a:solidFill>
                 <a:latin typeface="Segoe UI"/>
               </a:rPr>
-              <a:t>Next: production LLM gateway (Claude / Azure OpenAI GPT-4o) + streaming.</a:t>
+              <a:t>Next: server-side LLM proxy (key security, rate limiting) + response streaming.</a:t>
             </a:r>
           </a:p>
           <a:p>
@@ -5139,7 +5194,7 @@
                 </a:solidFill>
                 <a:latin typeface="Segoe UI"/>
               </a:rPr>
-              <a:t>Built with React 19 + Vite 8, a deterministic CLII engine, and a GenAI Copilot grounded in the user's real numbers.</a:t>
+              <a:t>Built with React 19 + Vite 8, a deterministic CLII engine, and a Gemini-powered GenAI Copilot grounded in the user's real numbers.</a:t>
             </a:r>
           </a:p>
         </p:txBody>
@@ -5775,7 +5830,7 @@
                 </a:solidFill>
                 <a:latin typeface="Segoe UI"/>
               </a:rPr>
-              <a:t>Employee: personal inflation rate, real-wage score, 12-month savings-depletion forecast, break-even raise %, and an AI negotiation coach.</a:t>
+              <a:t>Employee: personal inflation rate, real-wage score, 12-month savings-depletion forecast, break-even raise %, an investment allocator, and an AI negotiation coach.</a:t>
             </a:r>
           </a:p>
           <a:p>
@@ -5803,7 +5858,7 @@
                 </a:solidFill>
                 <a:latin typeface="Segoe UI"/>
               </a:rPr>
-              <a:t>Employer: dynamic budget simulator, attrition-risk ROI, city inflation heatmap, and a pay-fairness audit.</a:t>
+              <a:t>Employer: live compensation budget simulator, attrition-risk ROI, city inflation heatmap, and a computed pay-fairness audit.</a:t>
             </a:r>
           </a:p>
           <a:p>
@@ -5859,7 +5914,7 @@
                 </a:solidFill>
                 <a:latin typeface="Segoe UI"/>
               </a:rPr>
-              <a:t>GenAI Copilot: natural-language answers grounded in the user's own live numbers.</a:t>
+              <a:t>GenAI Copilot: Google Gemini, answering natural-language questions grounded in the user's own live numbers.</a:t>
             </a:r>
           </a:p>
           <a:p>
@@ -6412,7 +6467,7 @@
                 </a:solidFill>
                 <a:latin typeface="Segoe UI"/>
               </a:rPr>
-              <a:t>Domain logic extracted into src/lib/inflation.js — a single source of truth reused by 3 modules (DRY).</a:t>
+              <a:t>Domain logic extracted into src/lib/inflation.js — a single source of truth reused by all 5 modules (DRY), incl. analyzeWorkforce() for the Employer Console.</a:t>
             </a:r>
           </a:p>
           <a:p>
@@ -6440,7 +6495,7 @@
                 </a:solidFill>
                 <a:latin typeface="Segoe UI"/>
               </a:rPr>
-              <a:t>Pure, deterministic, testable functions: analyzeBudget(), savingsSeries(), break-even &amp; personal-inflation engine.</a:t>
+              <a:t>Pure, deterministic, testable functions: analyzeBudget(), savingsSeries(), analyzeWorkforce(), break-even &amp; personal-inflation engine.</a:t>
             </a:r>
           </a:p>
           <a:p>
@@ -6468,7 +6523,35 @@
                 </a:solidFill>
                 <a:latin typeface="Segoe UI"/>
               </a:rPr>
-              <a:t>Production build passes — 1,779 modules, ~80 KB gzip. oxlint clean. localStorage persistence survives refresh.</a:t>
+              <a:t>Cross-module consistency: changing city/salary in the Budget Planner live-syncs the Employee Portal, Coach and Copilot within 1 second.</a:t>
+            </a:r>
+          </a:p>
+          <a:p>
+            <a:pPr algn="l">
+              <a:spcBef>
+                <a:spcPts val="0"/>
+              </a:spcBef>
+              <a:spcAft>
+                <a:spcPts val="1300"/>
+              </a:spcAft>
+            </a:pPr>
+            <a:r>
+              <a:rPr sz="1800" b="1">
+                <a:solidFill>
+                  <a:srgbClr val="8B5CF6"/>
+                </a:solidFill>
+                <a:latin typeface="Segoe UI"/>
+              </a:rPr>
+              <a:t>▸  </a:t>
+            </a:r>
+            <a:r>
+              <a:rPr sz="1800">
+                <a:solidFill>
+                  <a:srgbClr val="B6BDCC"/>
+                </a:solidFill>
+                <a:latin typeface="Segoe UI"/>
+              </a:rPr>
+              <a:t>Production build passes — 1,780 modules, ~86 KB gzip. oxlint clean. localStorage persistence survives refresh.</a:t>
             </a:r>
           </a:p>
           <a:p>
@@ -7117,7 +7200,7 @@
                 </a:solidFill>
                 <a:latin typeface="Segoe UI"/>
               </a:rPr>
-              <a:t>Grounded, consistent, demo-safe</a:t>
+              <a:t>A real, live LLM — grounded and multi-turn</a:t>
             </a:r>
           </a:p>
         </p:txBody>
@@ -7164,11 +7247,11 @@
             <a:r>
               <a:rPr sz="1800">
                 <a:solidFill>
-                  <a:srgbClr val="B6BDCC"/>
-                </a:solidFill>
-                <a:latin typeface="Segoe UI"/>
-              </a:rPr>
-              <a:t>GenAI Copilot answers NL questions: 'Am I underpaid?', 'What is my attrition risk?'.</a:t>
+                  <a:srgbClr val="10B981"/>
+                </a:solidFill>
+                <a:latin typeface="Segoe UI"/>
+              </a:rPr>
+              <a:t>GenAI Copilot calls Google Gemini 2.0 Flash directly — a real model call, not a scripted response.</a:t>
             </a:r>
           </a:p>
           <a:p>
@@ -7196,7 +7279,7 @@
                 </a:solidFill>
                 <a:latin typeface="Segoe UI"/>
               </a:rPr>
-              <a:t>RAG-style grounding: the user's live budget + CLII data are injected as context, so answers cite real ₹ figures — not model priors.</a:t>
+              <a:t>RAG-style grounding: a system prompt injects the user's live budget, computed metrics, and the full CLII dataset for every city — answers cite the user's real ₹ figures, not model priors.</a:t>
             </a:r>
           </a:p>
           <a:p>
@@ -7220,11 +7303,11 @@
             <a:r>
               <a:rPr sz="1800">
                 <a:solidFill>
-                  <a:srgbClr val="10B981"/>
-                </a:solidFill>
-                <a:latin typeface="Segoe UI"/>
-              </a:rPr>
-              <a:t>One data story across surfaces: Budget Planner → Negotiation Coach → Copilot all read src/lib/inflation.js.</a:t>
+                  <a:srgbClr val="B6BDCC"/>
+                </a:solidFill>
+                <a:latin typeface="Segoe UI"/>
+              </a:rPr>
+              <a:t>Multi-turn: full conversation history is passed on every call, so follow-up questions stay in context.</a:t>
             </a:r>
           </a:p>
           <a:p>
@@ -7248,11 +7331,39 @@
             <a:r>
               <a:rPr sz="1800">
                 <a:solidFill>
-                  <a:srgbClr val="F59E0B"/>
-                </a:solidFill>
-                <a:latin typeface="Segoe UI"/>
-              </a:rPr>
-              <a:t>Roadmap: LLM gateway (Claude / Azure OpenAI GPT-4o) behind a server proxy; deterministic fallback keeps the demo alive offline.</a:t>
+                  <a:srgbClr val="10B981"/>
+                </a:solidFill>
+                <a:latin typeface="Segoe UI"/>
+              </a:rPr>
+              <a:t>One data story across surfaces: Budget Planner → Negotiation Coach → Copilot all read src/lib/inflation.js.</a:t>
+            </a:r>
+          </a:p>
+          <a:p>
+            <a:pPr algn="l">
+              <a:spcBef>
+                <a:spcPts val="0"/>
+              </a:spcBef>
+              <a:spcAft>
+                <a:spcPts val="1300"/>
+              </a:spcAft>
+            </a:pPr>
+            <a:r>
+              <a:rPr sz="1800" b="1">
+                <a:solidFill>
+                  <a:srgbClr val="8B5CF6"/>
+                </a:solidFill>
+                <a:latin typeface="Segoe UI"/>
+              </a:rPr>
+              <a:t>▸  </a:t>
+            </a:r>
+            <a:r>
+              <a:rPr sz="1800">
+                <a:solidFill>
+                  <a:srgbClr val="B6BDCC"/>
+                </a:solidFill>
+                <a:latin typeface="Segoe UI"/>
+              </a:rPr>
+              <a:t>Error-handled: a clear in-chat message (not a silent failure) if the API key or network is unavailable.</a:t>
             </a:r>
           </a:p>
         </p:txBody>
@@ -7316,7 +7427,7 @@
                 </a:solidFill>
                 <a:latin typeface="Segoe UI"/>
               </a:rPr>
-              <a:t>Copilot &amp; Coach already inject the user's real personal-inflation, break-even and target-salary numbers.</a:t>
+              <a:t>the Copilot is wired to a real Gemini API call (src/lib/llm.js) with the user's live personal-inflation, break-even and target-salary numbers as grounding context.</a:t>
             </a:r>
           </a:p>
         </p:txBody>
